--- a/javaSlides/Java Slides part 1.pptx
+++ b/javaSlides/Java Slides part 1.pptx
@@ -287,7 +287,7 @@
           <a:p>
             <a:fld id="{AF869721-F543-4A6C-BF9D-65D7CC540427}" type="datetimeFigureOut">
               <a:rPr lang="en-US" smtClean="0"/>
-              <a:t>5/13/2025</a:t>
+              <a:t>5/24/2025</a:t>
             </a:fld>
             <a:endParaRPr lang="en-US" dirty="0"/>
           </a:p>
@@ -464,7 +464,7 @@
           <a:p>
             <a:fld id="{C732326A-4C88-4AFB-AA5B-5919D81DFF5B}" type="datetimeFigureOut">
               <a:rPr lang="en-US" smtClean="0"/>
-              <a:t>5/13/2025</a:t>
+              <a:t>5/24/2025</a:t>
             </a:fld>
             <a:endParaRPr lang="en-US" dirty="0"/>
           </a:p>
@@ -1145,7 +1145,7 @@
             <a:fld id="{B61BEF0D-F0BB-DE4B-95CE-6DB70DBA9567}" type="datetimeFigureOut">
               <a:rPr lang="en-US" smtClean="0"/>
               <a:pPr/>
-              <a:t>5/13/2025</a:t>
+              <a:t>5/24/2025</a:t>
             </a:fld>
             <a:endParaRPr lang="en-US" dirty="0"/>
           </a:p>
@@ -1409,7 +1409,7 @@
             <a:fld id="{B61BEF0D-F0BB-DE4B-95CE-6DB70DBA9567}" type="datetimeFigureOut">
               <a:rPr lang="en-US" smtClean="0"/>
               <a:pPr/>
-              <a:t>5/13/2025</a:t>
+              <a:t>5/24/2025</a:t>
             </a:fld>
             <a:endParaRPr lang="en-US" dirty="0"/>
           </a:p>
@@ -1646,7 +1646,7 @@
             <a:fld id="{B61BEF0D-F0BB-DE4B-95CE-6DB70DBA9567}" type="datetimeFigureOut">
               <a:rPr lang="en-US" smtClean="0"/>
               <a:pPr/>
-              <a:t>5/13/2025</a:t>
+              <a:t>5/24/2025</a:t>
             </a:fld>
             <a:endParaRPr lang="en-US" dirty="0"/>
           </a:p>
@@ -1888,7 +1888,7 @@
             <a:fld id="{B61BEF0D-F0BB-DE4B-95CE-6DB70DBA9567}" type="datetimeFigureOut">
               <a:rPr lang="en-US" smtClean="0"/>
               <a:pPr/>
-              <a:t>5/13/2025</a:t>
+              <a:t>5/24/2025</a:t>
             </a:fld>
             <a:endParaRPr lang="en-US" dirty="0"/>
           </a:p>
@@ -2197,7 +2197,7 @@
             <a:fld id="{B61BEF0D-F0BB-DE4B-95CE-6DB70DBA9567}" type="datetimeFigureOut">
               <a:rPr lang="en-US" smtClean="0"/>
               <a:pPr/>
-              <a:t>5/13/2025</a:t>
+              <a:t>5/24/2025</a:t>
             </a:fld>
             <a:endParaRPr lang="en-US" dirty="0"/>
           </a:p>
@@ -2501,7 +2501,7 @@
             <a:fld id="{B61BEF0D-F0BB-DE4B-95CE-6DB70DBA9567}" type="datetimeFigureOut">
               <a:rPr lang="en-US" smtClean="0"/>
               <a:pPr/>
-              <a:t>5/13/2025</a:t>
+              <a:t>5/24/2025</a:t>
             </a:fld>
             <a:endParaRPr lang="en-US" dirty="0"/>
           </a:p>
@@ -2925,7 +2925,7 @@
             <a:fld id="{B61BEF0D-F0BB-DE4B-95CE-6DB70DBA9567}" type="datetimeFigureOut">
               <a:rPr lang="en-US" smtClean="0"/>
               <a:pPr/>
-              <a:t>5/13/2025</a:t>
+              <a:t>5/24/2025</a:t>
             </a:fld>
             <a:endParaRPr lang="en-US" dirty="0"/>
           </a:p>
@@ -3022,7 +3022,7 @@
             <a:fld id="{B61BEF0D-F0BB-DE4B-95CE-6DB70DBA9567}" type="datetimeFigureOut">
               <a:rPr lang="en-US" smtClean="0"/>
               <a:pPr/>
-              <a:t>5/13/2025</a:t>
+              <a:t>5/24/2025</a:t>
             </a:fld>
             <a:endParaRPr lang="en-US" dirty="0"/>
           </a:p>
@@ -3186,7 +3186,7 @@
             <a:fld id="{B61BEF0D-F0BB-DE4B-95CE-6DB70DBA9567}" type="datetimeFigureOut">
               <a:rPr lang="en-US" smtClean="0"/>
               <a:pPr/>
-              <a:t>5/13/2025</a:t>
+              <a:t>5/24/2025</a:t>
             </a:fld>
             <a:endParaRPr lang="en-US" dirty="0"/>
           </a:p>
@@ -3566,7 +3566,7 @@
             <a:fld id="{B61BEF0D-F0BB-DE4B-95CE-6DB70DBA9567}" type="datetimeFigureOut">
               <a:rPr lang="en-US" smtClean="0"/>
               <a:pPr/>
-              <a:t>5/13/2025</a:t>
+              <a:t>5/24/2025</a:t>
             </a:fld>
             <a:endParaRPr lang="en-US" dirty="0"/>
           </a:p>
@@ -3856,7 +3856,7 @@
             <a:fld id="{B61BEF0D-F0BB-DE4B-95CE-6DB70DBA9567}" type="datetimeFigureOut">
               <a:rPr lang="en-US" smtClean="0"/>
               <a:pPr/>
-              <a:t>5/13/2025</a:t>
+              <a:t>5/24/2025</a:t>
             </a:fld>
             <a:endParaRPr lang="en-US" dirty="0"/>
           </a:p>
@@ -4069,7 +4069,7 @@
             <a:fld id="{B61BEF0D-F0BB-DE4B-95CE-6DB70DBA9567}" type="datetimeFigureOut">
               <a:rPr lang="en-US" smtClean="0"/>
               <a:pPr/>
-              <a:t>5/13/2025</a:t>
+              <a:t>5/24/2025</a:t>
             </a:fld>
             <a:endParaRPr lang="en-US" dirty="0"/>
           </a:p>
